--- a/Tinder_Project.pptx
+++ b/Tinder_Project.pptx
@@ -267,7 +267,7 @@
           <a:p>
             <a:fld id="{3657AA7F-BE72-4467-897E-7A302F46504F}" type="datetimeFigureOut">
               <a:rPr lang="en-US" smtClean="0"/>
-              <a:t>2/17/2026</a:t>
+              <a:t>2/18/2026</a:t>
             </a:fld>
             <a:endParaRPr lang="en-US"/>
           </a:p>
@@ -466,7 +466,7 @@
           <a:p>
             <a:fld id="{3657AA7F-BE72-4467-897E-7A302F46504F}" type="datetimeFigureOut">
               <a:rPr lang="en-US" smtClean="0"/>
-              <a:t>2/17/2026</a:t>
+              <a:t>2/18/2026</a:t>
             </a:fld>
             <a:endParaRPr lang="en-US"/>
           </a:p>
@@ -675,7 +675,7 @@
           <a:p>
             <a:fld id="{3657AA7F-BE72-4467-897E-7A302F46504F}" type="datetimeFigureOut">
               <a:rPr lang="en-US" smtClean="0"/>
-              <a:t>2/17/2026</a:t>
+              <a:t>2/18/2026</a:t>
             </a:fld>
             <a:endParaRPr lang="en-US"/>
           </a:p>
@@ -874,7 +874,7 @@
           <a:p>
             <a:fld id="{3657AA7F-BE72-4467-897E-7A302F46504F}" type="datetimeFigureOut">
               <a:rPr lang="en-US" smtClean="0"/>
-              <a:t>2/17/2026</a:t>
+              <a:t>2/18/2026</a:t>
             </a:fld>
             <a:endParaRPr lang="en-US"/>
           </a:p>
@@ -1152,7 +1152,7 @@
           <a:p>
             <a:fld id="{3657AA7F-BE72-4467-897E-7A302F46504F}" type="datetimeFigureOut">
               <a:rPr lang="en-US" smtClean="0"/>
-              <a:t>2/17/2026</a:t>
+              <a:t>2/18/2026</a:t>
             </a:fld>
             <a:endParaRPr lang="en-US"/>
           </a:p>
@@ -1419,7 +1419,7 @@
           <a:p>
             <a:fld id="{3657AA7F-BE72-4467-897E-7A302F46504F}" type="datetimeFigureOut">
               <a:rPr lang="en-US" smtClean="0"/>
-              <a:t>2/17/2026</a:t>
+              <a:t>2/18/2026</a:t>
             </a:fld>
             <a:endParaRPr lang="en-US"/>
           </a:p>
@@ -1833,7 +1833,7 @@
           <a:p>
             <a:fld id="{3657AA7F-BE72-4467-897E-7A302F46504F}" type="datetimeFigureOut">
               <a:rPr lang="en-US" smtClean="0"/>
-              <a:t>2/17/2026</a:t>
+              <a:t>2/18/2026</a:t>
             </a:fld>
             <a:endParaRPr lang="en-US"/>
           </a:p>
@@ -1974,7 +1974,7 @@
           <a:p>
             <a:fld id="{3657AA7F-BE72-4467-897E-7A302F46504F}" type="datetimeFigureOut">
               <a:rPr lang="en-US" smtClean="0"/>
-              <a:t>2/17/2026</a:t>
+              <a:t>2/18/2026</a:t>
             </a:fld>
             <a:endParaRPr lang="en-US"/>
           </a:p>
@@ -2087,7 +2087,7 @@
           <a:p>
             <a:fld id="{3657AA7F-BE72-4467-897E-7A302F46504F}" type="datetimeFigureOut">
               <a:rPr lang="en-US" smtClean="0"/>
-              <a:t>2/17/2026</a:t>
+              <a:t>2/18/2026</a:t>
             </a:fld>
             <a:endParaRPr lang="en-US"/>
           </a:p>
@@ -2403,7 +2403,7 @@
           <a:p>
             <a:fld id="{3657AA7F-BE72-4467-897E-7A302F46504F}" type="datetimeFigureOut">
               <a:rPr lang="en-US" smtClean="0"/>
-              <a:t>2/17/2026</a:t>
+              <a:t>2/18/2026</a:t>
             </a:fld>
             <a:endParaRPr lang="en-US"/>
           </a:p>
@@ -2697,7 +2697,7 @@
           <a:p>
             <a:fld id="{3657AA7F-BE72-4467-897E-7A302F46504F}" type="datetimeFigureOut">
               <a:rPr lang="en-US" smtClean="0"/>
-              <a:t>2/17/2026</a:t>
+              <a:t>2/18/2026</a:t>
             </a:fld>
             <a:endParaRPr lang="en-US"/>
           </a:p>
@@ -3053,7 +3053,7 @@
             <a:fld id="{3657AA7F-BE72-4467-897E-7A302F46504F}" type="datetimeFigureOut">
               <a:rPr lang="en-US" smtClean="0"/>
               <a:pPr/>
-              <a:t>2/17/2026</a:t>
+              <a:t>2/18/2026</a:t>
             </a:fld>
             <a:endParaRPr lang="en-US" dirty="0"/>
           </a:p>
@@ -10164,8 +10164,8 @@
         </p:nvSpPr>
         <p:spPr>
           <a:xfrm>
-            <a:off x="853226" y="521804"/>
-            <a:ext cx="7059598" cy="801300"/>
+            <a:off x="853226" y="521803"/>
+            <a:ext cx="7059598" cy="1525657"/>
           </a:xfrm>
         </p:spPr>
         <p:txBody>
@@ -10199,8 +10199,8 @@
         </p:nvSpPr>
         <p:spPr>
           <a:xfrm>
-            <a:off x="84486" y="1366630"/>
-            <a:ext cx="8527774" cy="5347253"/>
+            <a:off x="84486" y="2345635"/>
+            <a:ext cx="8527774" cy="4368248"/>
           </a:xfrm>
         </p:spPr>
         <p:txBody>
@@ -10208,23 +10208,6 @@
             <a:noAutofit/>
           </a:bodyPr>
           <a:lstStyle/>
-          <a:p>
-            <a:pPr marL="0" indent="0">
-              <a:lnSpc>
-                <a:spcPct val="160000"/>
-              </a:lnSpc>
-              <a:buNone/>
-            </a:pPr>
-            <a:r>
-              <a:rPr lang="fr-FR" sz="2400" b="1" dirty="0">
-                <a:latin typeface="+mj-lt"/>
-              </a:rPr>
-              <a:t>Synthèse</a:t>
-            </a:r>
-            <a:endParaRPr lang="fr-FR" sz="2400" dirty="0">
-              <a:latin typeface="+mj-lt"/>
-            </a:endParaRPr>
-          </a:p>
           <a:p>
             <a:pPr marL="0" indent="0">
               <a:lnSpc>
@@ -10276,7 +10259,7 @@
               <a:rPr lang="fr-FR" altLang="fr-FR" sz="2400" b="1" dirty="0">
                 <a:latin typeface="+mj-lt"/>
               </a:rPr>
-              <a:t>Expertise démontrée</a:t>
+              <a:t>Expertise pratiquée</a:t>
             </a:r>
             <a:r>
               <a:rPr lang="fr-FR" altLang="fr-FR" sz="2400" dirty="0">
@@ -10286,7 +10269,7 @@
             </a:r>
           </a:p>
           <a:p>
-            <a:pPr marL="0" indent="0" eaLnBrk="0" fontAlgn="base" hangingPunct="0">
+            <a:pPr marL="457200" lvl="1" indent="0" eaLnBrk="0" fontAlgn="base" hangingPunct="0">
               <a:lnSpc>
                 <a:spcPct val="160000"/>
               </a:lnSpc>
@@ -10301,14 +10284,14 @@
               <a:buAutoNum type="arabicPeriod"/>
             </a:pPr>
             <a:r>
-              <a:rPr lang="fr-FR" altLang="fr-FR" dirty="0">
+              <a:rPr lang="fr-FR" altLang="fr-FR" sz="2000" dirty="0">
                 <a:latin typeface="+mj-lt"/>
               </a:rPr>
               <a:t>Nettoyage de données complexes.</a:t>
             </a:r>
           </a:p>
           <a:p>
-            <a:pPr marL="0" indent="0" eaLnBrk="0" fontAlgn="base" hangingPunct="0">
+            <a:pPr marL="457200" lvl="1" indent="0" eaLnBrk="0" fontAlgn="base" hangingPunct="0">
               <a:lnSpc>
                 <a:spcPct val="160000"/>
               </a:lnSpc>
@@ -10323,14 +10306,14 @@
               <a:buAutoNum type="arabicPeriod" startAt="2"/>
             </a:pPr>
             <a:r>
-              <a:rPr lang="fr-FR" altLang="fr-FR" dirty="0">
+              <a:rPr lang="fr-FR" altLang="fr-FR" sz="2000" dirty="0">
                 <a:latin typeface="+mj-lt"/>
               </a:rPr>
               <a:t>Modélisation statistique (Régression Logistique).</a:t>
             </a:r>
           </a:p>
           <a:p>
-            <a:pPr marL="0" indent="0" eaLnBrk="0" fontAlgn="base" hangingPunct="0">
+            <a:pPr marL="457200" lvl="1" indent="0" eaLnBrk="0" fontAlgn="base" hangingPunct="0">
               <a:lnSpc>
                 <a:spcPct val="160000"/>
               </a:lnSpc>
@@ -10345,7 +10328,7 @@
               <a:buAutoNum type="arabicPeriod" startAt="3"/>
             </a:pPr>
             <a:r>
-              <a:rPr lang="fr-FR" altLang="fr-FR" dirty="0">
+              <a:rPr lang="fr-FR" altLang="fr-FR" sz="2000" dirty="0">
                 <a:latin typeface="+mj-lt"/>
               </a:rPr>
               <a:t>Data Storytelling (Radar Charts).</a:t>
@@ -10368,33 +10351,6 @@
             <a:endParaRPr lang="fr-FR" altLang="fr-FR" sz="1000" dirty="0">
               <a:latin typeface="+mj-lt"/>
             </a:endParaRPr>
-          </a:p>
-          <a:p>
-            <a:pPr marL="0" lvl="0" indent="0" eaLnBrk="0" fontAlgn="base" hangingPunct="0">
-              <a:lnSpc>
-                <a:spcPct val="160000"/>
-              </a:lnSpc>
-              <a:spcBef>
-                <a:spcPct val="0"/>
-              </a:spcBef>
-              <a:spcAft>
-                <a:spcPct val="0"/>
-              </a:spcAft>
-              <a:buClrTx/>
-              <a:buNone/>
-            </a:pPr>
-            <a:r>
-              <a:rPr lang="fr-FR" altLang="fr-FR" sz="2400" b="1" dirty="0">
-                <a:latin typeface="+mj-lt"/>
-              </a:rPr>
-              <a:t>Ouverture</a:t>
-            </a:r>
-            <a:r>
-              <a:rPr lang="fr-FR" altLang="fr-FR" sz="2400" dirty="0">
-                <a:latin typeface="+mj-lt"/>
-              </a:rPr>
-              <a:t> </a:t>
-            </a:r>
           </a:p>
           <a:p>
             <a:pPr marL="0" lvl="0" indent="0" eaLnBrk="0" fontAlgn="base" hangingPunct="0">
@@ -10414,7 +10370,7 @@
               <a:rPr lang="fr-FR" altLang="fr-FR" dirty="0">
                 <a:latin typeface="+mj-lt"/>
               </a:rPr>
-              <a:t>Prêt à appliquer cette rigueur aux enjeux business.</a:t>
+              <a:t>Je suis prêt à appliquer cette rigueur aux enjeux business.</a:t>
             </a:r>
           </a:p>
         </p:txBody>
@@ -10675,6 +10631,408 @@
   <p:clrMapOvr>
     <a:masterClrMapping/>
   </p:clrMapOvr>
+  <p:timing>
+    <p:tnLst>
+      <p:par>
+        <p:cTn id="1" dur="indefinite" restart="never" nodeType="tmRoot">
+          <p:childTnLst>
+            <p:seq concurrent="1" nextAc="seek">
+              <p:cTn id="2" dur="indefinite" nodeType="mainSeq">
+                <p:childTnLst>
+                  <p:par>
+                    <p:cTn id="3" fill="hold">
+                      <p:stCondLst>
+                        <p:cond delay="indefinite"/>
+                        <p:cond evt="onBegin" delay="0">
+                          <p:tn val="2"/>
+                        </p:cond>
+                      </p:stCondLst>
+                      <p:childTnLst>
+                        <p:par>
+                          <p:cTn id="4" fill="hold">
+                            <p:stCondLst>
+                              <p:cond delay="0"/>
+                            </p:stCondLst>
+                            <p:childTnLst>
+                              <p:par>
+                                <p:cTn id="5" presetID="16" presetClass="entr" presetSubtype="21" fill="hold" grpId="0" nodeType="afterEffect">
+                                  <p:stCondLst>
+                                    <p:cond delay="0"/>
+                                  </p:stCondLst>
+                                  <p:childTnLst>
+                                    <p:set>
+                                      <p:cBhvr>
+                                        <p:cTn id="6" dur="1" fill="hold">
+                                          <p:stCondLst>
+                                            <p:cond delay="0"/>
+                                          </p:stCondLst>
+                                        </p:cTn>
+                                        <p:tgtEl>
+                                          <p:spTgt spid="2"/>
+                                        </p:tgtEl>
+                                        <p:attrNameLst>
+                                          <p:attrName>style.visibility</p:attrName>
+                                        </p:attrNameLst>
+                                      </p:cBhvr>
+                                      <p:to>
+                                        <p:strVal val="visible"/>
+                                      </p:to>
+                                    </p:set>
+                                    <p:animEffect transition="in" filter="barn(inVertical)">
+                                      <p:cBhvr>
+                                        <p:cTn id="7" dur="500"/>
+                                        <p:tgtEl>
+                                          <p:spTgt spid="2"/>
+                                        </p:tgtEl>
+                                      </p:cBhvr>
+                                    </p:animEffect>
+                                  </p:childTnLst>
+                                </p:cTn>
+                              </p:par>
+                            </p:childTnLst>
+                          </p:cTn>
+                        </p:par>
+                        <p:par>
+                          <p:cTn id="8" fill="hold">
+                            <p:stCondLst>
+                              <p:cond delay="500"/>
+                            </p:stCondLst>
+                            <p:childTnLst>
+                              <p:par>
+                                <p:cTn id="9" presetID="10" presetClass="entr" presetSubtype="0" fill="hold" grpId="0" nodeType="afterEffect">
+                                  <p:stCondLst>
+                                    <p:cond delay="0"/>
+                                  </p:stCondLst>
+                                  <p:childTnLst>
+                                    <p:set>
+                                      <p:cBhvr>
+                                        <p:cTn id="10" dur="1" fill="hold">
+                                          <p:stCondLst>
+                                            <p:cond delay="0"/>
+                                          </p:stCondLst>
+                                        </p:cTn>
+                                        <p:tgtEl>
+                                          <p:spTgt spid="3">
+                                            <p:txEl>
+                                              <p:pRg st="0" end="0"/>
+                                            </p:txEl>
+                                          </p:spTgt>
+                                        </p:tgtEl>
+                                        <p:attrNameLst>
+                                          <p:attrName>style.visibility</p:attrName>
+                                        </p:attrNameLst>
+                                      </p:cBhvr>
+                                      <p:to>
+                                        <p:strVal val="visible"/>
+                                      </p:to>
+                                    </p:set>
+                                    <p:animEffect transition="in" filter="fade">
+                                      <p:cBhvr>
+                                        <p:cTn id="11" dur="500"/>
+                                        <p:tgtEl>
+                                          <p:spTgt spid="3">
+                                            <p:txEl>
+                                              <p:pRg st="0" end="0"/>
+                                            </p:txEl>
+                                          </p:spTgt>
+                                        </p:tgtEl>
+                                      </p:cBhvr>
+                                    </p:animEffect>
+                                  </p:childTnLst>
+                                </p:cTn>
+                              </p:par>
+                            </p:childTnLst>
+                          </p:cTn>
+                        </p:par>
+                        <p:par>
+                          <p:cTn id="12" fill="hold">
+                            <p:stCondLst>
+                              <p:cond delay="1000"/>
+                            </p:stCondLst>
+                            <p:childTnLst>
+                              <p:par>
+                                <p:cTn id="13" presetID="10" presetClass="entr" presetSubtype="0" fill="hold" grpId="0" nodeType="afterEffect">
+                                  <p:stCondLst>
+                                    <p:cond delay="0"/>
+                                  </p:stCondLst>
+                                  <p:childTnLst>
+                                    <p:set>
+                                      <p:cBhvr>
+                                        <p:cTn id="14" dur="1" fill="hold">
+                                          <p:stCondLst>
+                                            <p:cond delay="0"/>
+                                          </p:stCondLst>
+                                        </p:cTn>
+                                        <p:tgtEl>
+                                          <p:spTgt spid="3">
+                                            <p:txEl>
+                                              <p:pRg st="2" end="2"/>
+                                            </p:txEl>
+                                          </p:spTgt>
+                                        </p:tgtEl>
+                                        <p:attrNameLst>
+                                          <p:attrName>style.visibility</p:attrName>
+                                        </p:attrNameLst>
+                                      </p:cBhvr>
+                                      <p:to>
+                                        <p:strVal val="visible"/>
+                                      </p:to>
+                                    </p:set>
+                                    <p:animEffect transition="in" filter="fade">
+                                      <p:cBhvr>
+                                        <p:cTn id="15" dur="500"/>
+                                        <p:tgtEl>
+                                          <p:spTgt spid="3">
+                                            <p:txEl>
+                                              <p:pRg st="2" end="2"/>
+                                            </p:txEl>
+                                          </p:spTgt>
+                                        </p:tgtEl>
+                                      </p:cBhvr>
+                                    </p:animEffect>
+                                  </p:childTnLst>
+                                </p:cTn>
+                              </p:par>
+                            </p:childTnLst>
+                          </p:cTn>
+                        </p:par>
+                        <p:par>
+                          <p:cTn id="16" fill="hold">
+                            <p:stCondLst>
+                              <p:cond delay="1500"/>
+                            </p:stCondLst>
+                            <p:childTnLst>
+                              <p:par>
+                                <p:cTn id="17" presetID="10" presetClass="entr" presetSubtype="0" fill="hold" grpId="0" nodeType="afterEffect">
+                                  <p:stCondLst>
+                                    <p:cond delay="0"/>
+                                  </p:stCondLst>
+                                  <p:childTnLst>
+                                    <p:set>
+                                      <p:cBhvr>
+                                        <p:cTn id="18" dur="1" fill="hold">
+                                          <p:stCondLst>
+                                            <p:cond delay="0"/>
+                                          </p:stCondLst>
+                                        </p:cTn>
+                                        <p:tgtEl>
+                                          <p:spTgt spid="3">
+                                            <p:txEl>
+                                              <p:pRg st="3" end="3"/>
+                                            </p:txEl>
+                                          </p:spTgt>
+                                        </p:tgtEl>
+                                        <p:attrNameLst>
+                                          <p:attrName>style.visibility</p:attrName>
+                                        </p:attrNameLst>
+                                      </p:cBhvr>
+                                      <p:to>
+                                        <p:strVal val="visible"/>
+                                      </p:to>
+                                    </p:set>
+                                    <p:animEffect transition="in" filter="fade">
+                                      <p:cBhvr>
+                                        <p:cTn id="19" dur="500"/>
+                                        <p:tgtEl>
+                                          <p:spTgt spid="3">
+                                            <p:txEl>
+                                              <p:pRg st="3" end="3"/>
+                                            </p:txEl>
+                                          </p:spTgt>
+                                        </p:tgtEl>
+                                      </p:cBhvr>
+                                    </p:animEffect>
+                                  </p:childTnLst>
+                                </p:cTn>
+                              </p:par>
+                            </p:childTnLst>
+                          </p:cTn>
+                        </p:par>
+                        <p:par>
+                          <p:cTn id="20" fill="hold">
+                            <p:stCondLst>
+                              <p:cond delay="2000"/>
+                            </p:stCondLst>
+                            <p:childTnLst>
+                              <p:par>
+                                <p:cTn id="21" presetID="10" presetClass="entr" presetSubtype="0" fill="hold" grpId="0" nodeType="afterEffect">
+                                  <p:stCondLst>
+                                    <p:cond delay="0"/>
+                                  </p:stCondLst>
+                                  <p:childTnLst>
+                                    <p:set>
+                                      <p:cBhvr>
+                                        <p:cTn id="22" dur="1" fill="hold">
+                                          <p:stCondLst>
+                                            <p:cond delay="0"/>
+                                          </p:stCondLst>
+                                        </p:cTn>
+                                        <p:tgtEl>
+                                          <p:spTgt spid="3">
+                                            <p:txEl>
+                                              <p:pRg st="4" end="4"/>
+                                            </p:txEl>
+                                          </p:spTgt>
+                                        </p:tgtEl>
+                                        <p:attrNameLst>
+                                          <p:attrName>style.visibility</p:attrName>
+                                        </p:attrNameLst>
+                                      </p:cBhvr>
+                                      <p:to>
+                                        <p:strVal val="visible"/>
+                                      </p:to>
+                                    </p:set>
+                                    <p:animEffect transition="in" filter="fade">
+                                      <p:cBhvr>
+                                        <p:cTn id="23" dur="500"/>
+                                        <p:tgtEl>
+                                          <p:spTgt spid="3">
+                                            <p:txEl>
+                                              <p:pRg st="4" end="4"/>
+                                            </p:txEl>
+                                          </p:spTgt>
+                                        </p:tgtEl>
+                                      </p:cBhvr>
+                                    </p:animEffect>
+                                  </p:childTnLst>
+                                </p:cTn>
+                              </p:par>
+                            </p:childTnLst>
+                          </p:cTn>
+                        </p:par>
+                        <p:par>
+                          <p:cTn id="24" fill="hold">
+                            <p:stCondLst>
+                              <p:cond delay="2500"/>
+                            </p:stCondLst>
+                            <p:childTnLst>
+                              <p:par>
+                                <p:cTn id="25" presetID="10" presetClass="entr" presetSubtype="0" fill="hold" grpId="0" nodeType="afterEffect">
+                                  <p:stCondLst>
+                                    <p:cond delay="0"/>
+                                  </p:stCondLst>
+                                  <p:childTnLst>
+                                    <p:set>
+                                      <p:cBhvr>
+                                        <p:cTn id="26" dur="1" fill="hold">
+                                          <p:stCondLst>
+                                            <p:cond delay="0"/>
+                                          </p:stCondLst>
+                                        </p:cTn>
+                                        <p:tgtEl>
+                                          <p:spTgt spid="3">
+                                            <p:txEl>
+                                              <p:pRg st="5" end="5"/>
+                                            </p:txEl>
+                                          </p:spTgt>
+                                        </p:tgtEl>
+                                        <p:attrNameLst>
+                                          <p:attrName>style.visibility</p:attrName>
+                                        </p:attrNameLst>
+                                      </p:cBhvr>
+                                      <p:to>
+                                        <p:strVal val="visible"/>
+                                      </p:to>
+                                    </p:set>
+                                    <p:animEffect transition="in" filter="fade">
+                                      <p:cBhvr>
+                                        <p:cTn id="27" dur="500"/>
+                                        <p:tgtEl>
+                                          <p:spTgt spid="3">
+                                            <p:txEl>
+                                              <p:pRg st="5" end="5"/>
+                                            </p:txEl>
+                                          </p:spTgt>
+                                        </p:tgtEl>
+                                      </p:cBhvr>
+                                    </p:animEffect>
+                                  </p:childTnLst>
+                                </p:cTn>
+                              </p:par>
+                            </p:childTnLst>
+                          </p:cTn>
+                        </p:par>
+                        <p:par>
+                          <p:cTn id="28" fill="hold">
+                            <p:stCondLst>
+                              <p:cond delay="3000"/>
+                            </p:stCondLst>
+                            <p:childTnLst>
+                              <p:par>
+                                <p:cTn id="29" presetID="10" presetClass="entr" presetSubtype="0" fill="hold" grpId="0" nodeType="afterEffect">
+                                  <p:stCondLst>
+                                    <p:cond delay="0"/>
+                                  </p:stCondLst>
+                                  <p:childTnLst>
+                                    <p:set>
+                                      <p:cBhvr>
+                                        <p:cTn id="30" dur="1" fill="hold">
+                                          <p:stCondLst>
+                                            <p:cond delay="0"/>
+                                          </p:stCondLst>
+                                        </p:cTn>
+                                        <p:tgtEl>
+                                          <p:spTgt spid="3">
+                                            <p:txEl>
+                                              <p:pRg st="7" end="7"/>
+                                            </p:txEl>
+                                          </p:spTgt>
+                                        </p:tgtEl>
+                                        <p:attrNameLst>
+                                          <p:attrName>style.visibility</p:attrName>
+                                        </p:attrNameLst>
+                                      </p:cBhvr>
+                                      <p:to>
+                                        <p:strVal val="visible"/>
+                                      </p:to>
+                                    </p:set>
+                                    <p:animEffect transition="in" filter="fade">
+                                      <p:cBhvr>
+                                        <p:cTn id="31" dur="500"/>
+                                        <p:tgtEl>
+                                          <p:spTgt spid="3">
+                                            <p:txEl>
+                                              <p:pRg st="7" end="7"/>
+                                            </p:txEl>
+                                          </p:spTgt>
+                                        </p:tgtEl>
+                                      </p:cBhvr>
+                                    </p:animEffect>
+                                  </p:childTnLst>
+                                </p:cTn>
+                              </p:par>
+                            </p:childTnLst>
+                          </p:cTn>
+                        </p:par>
+                      </p:childTnLst>
+                    </p:cTn>
+                  </p:par>
+                </p:childTnLst>
+              </p:cTn>
+              <p:prevCondLst>
+                <p:cond evt="onPrev" delay="0">
+                  <p:tgtEl>
+                    <p:sldTgt/>
+                  </p:tgtEl>
+                </p:cond>
+              </p:prevCondLst>
+              <p:nextCondLst>
+                <p:cond evt="onNext" delay="0">
+                  <p:tgtEl>
+                    <p:sldTgt/>
+                  </p:tgtEl>
+                </p:cond>
+              </p:nextCondLst>
+            </p:seq>
+          </p:childTnLst>
+        </p:cTn>
+      </p:par>
+    </p:tnLst>
+    <p:bldLst>
+      <p:bldP spid="2" grpId="0"/>
+      <p:bldP spid="3" grpId="0" build="p"/>
+    </p:bldLst>
+  </p:timing>
 </p:sld>
 </file>
 
